--- a/Planning docs/Slides/lesson-9-4-teacher-slides.pptx
+++ b/Planning docs/Slides/lesson-9-4-teacher-slides.pptx
@@ -4874,7 +4874,7 @@
                 <a:ea typeface="Calibri" pitchFamily="34" charset="-122"/>
                 <a:cs typeface="Calibri" pitchFamily="34" charset="-120"/>
               </a:rPr>
-              <a:t>•  How has Roscuro changed since Chapter 8?</a:t>
+              <a:t>•  Gregory gives Roscuro something very important before the end. What is it, and why does it matter?</a:t>
             </a:r>
             <a:endParaRPr lang="en-US" sz="1500" dirty="0"/>
           </a:p>
@@ -4891,24 +4891,7 @@
                 <a:ea typeface="Calibri" pitchFamily="34" charset="-122"/>
                 <a:cs typeface="Calibri" pitchFamily="34" charset="-120"/>
               </a:rPr>
-              <a:t>•  What do Despereaux and Roscuro have in common?</a:t>
-            </a:r>
-            <a:endParaRPr lang="en-US" sz="1500" dirty="0"/>
-          </a:p>
-          <a:p>
-            <a:pPr indent="0" marL="0">
-              <a:buNone/>
-            </a:pPr>
-            <a:r>
-              <a:rPr lang="en-US" sz="1500" dirty="0">
-                <a:solidFill>
-                  <a:srgbClr val="1E293B"/>
-                </a:solidFill>
-                <a:latin typeface="Calibri" pitchFamily="34" charset="0"/>
-                <a:ea typeface="Calibri" pitchFamily="34" charset="-122"/>
-                <a:cs typeface="Calibri" pitchFamily="34" charset="-120"/>
-              </a:rPr>
-              <a:t>•  What do you predict will happen when their paths cross?</a:t>
+              <a:t>•  Roscuro makes a decision at the end of Book Two. What does he decide, and why?</a:t>
             </a:r>
             <a:endParaRPr lang="en-US" sz="1500" dirty="0"/>
           </a:p>
